--- a/Entregas/UC/New Presentation.pptx
+++ b/Entregas/UC/New Presentation.pptx
@@ -114,7 +114,41 @@
       </a:defRPr>
     </a:lvl9pPr>
   </p:defaultTextStyle>
+  <p:extLst>
+    <p:ext uri="{EFAFB233-063F-42B5-8137-9DF3F51BA10A}">
+      <p15:sldGuideLst xmlns:p15="http://schemas.microsoft.com/office/powerpoint/2012/main"/>
+    </p:ext>
+  </p:extLst>
 </p:presentation>
+</file>
+
+<file path=ppt/changesInfos/changesInfo1.xml><?xml version="1.0" encoding="utf-8"?>
+<pc:chgInfo xmlns:a="http://schemas.openxmlformats.org/drawingml/2006/main" xmlns:r="http://schemas.openxmlformats.org/officeDocument/2006/relationships" xmlns:ac="http://schemas.microsoft.com/office/drawing/2013/main/command" xmlns:pc="http://schemas.microsoft.com/office/powerpoint/2013/main/command">
+  <pc:docChgLst>
+    <pc:chgData name="Franco Andrés Chiappe Donoso" userId="952ef6fb-7da9-433b-9cb5-ab1c1c91cce3" providerId="ADAL" clId="{D482683E-DF45-4BA1-B60E-919AB3CEA91E}"/>
+    <pc:docChg chg="undo custSel modSld">
+      <pc:chgData name="Franco Andrés Chiappe Donoso" userId="952ef6fb-7da9-433b-9cb5-ab1c1c91cce3" providerId="ADAL" clId="{D482683E-DF45-4BA1-B60E-919AB3CEA91E}" dt="2025-11-24T19:42:16.336" v="1" actId="20577"/>
+      <pc:docMkLst>
+        <pc:docMk/>
+      </pc:docMkLst>
+      <pc:sldChg chg="modSp mod">
+        <pc:chgData name="Franco Andrés Chiappe Donoso" userId="952ef6fb-7da9-433b-9cb5-ab1c1c91cce3" providerId="ADAL" clId="{D482683E-DF45-4BA1-B60E-919AB3CEA91E}" dt="2025-11-24T19:42:16.336" v="1" actId="20577"/>
+        <pc:sldMkLst>
+          <pc:docMk/>
+          <pc:sldMk cId="704265770" sldId="256"/>
+        </pc:sldMkLst>
+        <pc:spChg chg="mod">
+          <ac:chgData name="Franco Andrés Chiappe Donoso" userId="952ef6fb-7da9-433b-9cb5-ab1c1c91cce3" providerId="ADAL" clId="{D482683E-DF45-4BA1-B60E-919AB3CEA91E}" dt="2025-11-24T19:42:16.336" v="1" actId="20577"/>
+          <ac:spMkLst>
+            <pc:docMk/>
+            <pc:sldMk cId="704265770" sldId="256"/>
+            <ac:spMk id="2" creationId="{521CB9B4-2F2D-7DF0-CF49-642A88830C58}"/>
+          </ac:spMkLst>
+        </pc:spChg>
+      </pc:sldChg>
+    </pc:docChg>
+  </pc:docChgLst>
+</pc:chgInfo>
 </file>
 
 <file path=ppt/notesMasters/notesMaster1.xml><?xml version="1.0" encoding="utf-8"?>
@@ -199,7 +233,7 @@
           <a:p>
             <a:fld id="{8E426019-AE77-488C-A5EB-72DA0AB2005C}" type="datetimeFigureOut">
               <a:rPr lang="es-CL" smtClean="0"/>
-              <a:t>07-11-2025</a:t>
+              <a:t>24-11-2025</a:t>
             </a:fld>
             <a:endParaRPr lang="es-CL"/>
           </a:p>
@@ -1020,7 +1054,7 @@
             <a:fld id="{B61BEF0D-F0BB-DE4B-95CE-6DB70DBA9567}" type="datetimeFigureOut">
               <a:rPr lang="en-US" smtClean="0"/>
               <a:pPr/>
-              <a:t>11/7/2025</a:t>
+              <a:t>11/24/2025</a:t>
             </a:fld>
             <a:endParaRPr lang="en-US" dirty="0"/>
           </a:p>
@@ -1279,7 +1313,7 @@
             <a:fld id="{B61BEF0D-F0BB-DE4B-95CE-6DB70DBA9567}" type="datetimeFigureOut">
               <a:rPr lang="en-US" smtClean="0"/>
               <a:pPr/>
-              <a:t>11/7/2025</a:t>
+              <a:t>11/24/2025</a:t>
             </a:fld>
             <a:endParaRPr lang="en-US" dirty="0"/>
           </a:p>
@@ -1511,7 +1545,7 @@
             <a:fld id="{B61BEF0D-F0BB-DE4B-95CE-6DB70DBA9567}" type="datetimeFigureOut">
               <a:rPr lang="en-US" smtClean="0"/>
               <a:pPr/>
-              <a:t>11/7/2025</a:t>
+              <a:t>11/24/2025</a:t>
             </a:fld>
             <a:endParaRPr lang="en-US" dirty="0"/>
           </a:p>
@@ -1747,7 +1781,7 @@
             <a:fld id="{B61BEF0D-F0BB-DE4B-95CE-6DB70DBA9567}" type="datetimeFigureOut">
               <a:rPr lang="en-US" smtClean="0"/>
               <a:pPr/>
-              <a:t>11/7/2025</a:t>
+              <a:t>11/24/2025</a:t>
             </a:fld>
             <a:endParaRPr lang="en-US" dirty="0"/>
           </a:p>
@@ -2051,7 +2085,7 @@
             <a:fld id="{B61BEF0D-F0BB-DE4B-95CE-6DB70DBA9567}" type="datetimeFigureOut">
               <a:rPr lang="en-US" smtClean="0"/>
               <a:pPr/>
-              <a:t>11/7/2025</a:t>
+              <a:t>11/24/2025</a:t>
             </a:fld>
             <a:endParaRPr lang="en-US" dirty="0"/>
           </a:p>
@@ -2311,7 +2345,7 @@
             <a:fld id="{B61BEF0D-F0BB-DE4B-95CE-6DB70DBA9567}" type="datetimeFigureOut">
               <a:rPr lang="en-US" smtClean="0"/>
               <a:pPr/>
-              <a:t>11/7/2025</a:t>
+              <a:t>11/24/2025</a:t>
             </a:fld>
             <a:endParaRPr lang="en-US" dirty="0"/>
           </a:p>
@@ -2742,7 +2776,7 @@
             <a:fld id="{B61BEF0D-F0BB-DE4B-95CE-6DB70DBA9567}" type="datetimeFigureOut">
               <a:rPr lang="en-US" smtClean="0"/>
               <a:pPr/>
-              <a:t>11/7/2025</a:t>
+              <a:t>11/24/2025</a:t>
             </a:fld>
             <a:endParaRPr lang="en-US" dirty="0"/>
           </a:p>
@@ -2886,7 +2920,7 @@
             <a:fld id="{B61BEF0D-F0BB-DE4B-95CE-6DB70DBA9567}" type="datetimeFigureOut">
               <a:rPr lang="en-US" smtClean="0"/>
               <a:pPr/>
-              <a:t>11/7/2025</a:t>
+              <a:t>11/24/2025</a:t>
             </a:fld>
             <a:endParaRPr lang="en-US" dirty="0"/>
           </a:p>
@@ -3045,7 +3079,7 @@
             <a:fld id="{B61BEF0D-F0BB-DE4B-95CE-6DB70DBA9567}" type="datetimeFigureOut">
               <a:rPr lang="en-US" smtClean="0"/>
               <a:pPr/>
-              <a:t>11/7/2025</a:t>
+              <a:t>11/24/2025</a:t>
             </a:fld>
             <a:endParaRPr lang="en-US" dirty="0"/>
           </a:p>
@@ -3420,7 +3454,7 @@
             <a:fld id="{B61BEF0D-F0BB-DE4B-95CE-6DB70DBA9567}" type="datetimeFigureOut">
               <a:rPr lang="en-US" smtClean="0"/>
               <a:pPr/>
-              <a:t>11/7/2025</a:t>
+              <a:t>11/24/2025</a:t>
             </a:fld>
             <a:endParaRPr lang="en-US" dirty="0"/>
           </a:p>
@@ -3706,7 +3740,7 @@
             <a:fld id="{B61BEF0D-F0BB-DE4B-95CE-6DB70DBA9567}" type="datetimeFigureOut">
               <a:rPr lang="en-US" smtClean="0"/>
               <a:pPr/>
-              <a:t>11/7/2025</a:t>
+              <a:t>11/24/2025</a:t>
             </a:fld>
             <a:endParaRPr lang="en-US" dirty="0"/>
           </a:p>
@@ -3913,7 +3947,7 @@
             <a:fld id="{B61BEF0D-F0BB-DE4B-95CE-6DB70DBA9567}" type="datetimeFigureOut">
               <a:rPr lang="en-US" smtClean="0"/>
               <a:pPr/>
-              <a:t>11/7/2025</a:t>
+              <a:t>11/24/2025</a:t>
             </a:fld>
             <a:endParaRPr lang="en-US" dirty="0"/>
           </a:p>
@@ -4633,29 +4667,29 @@
               </a:lnSpc>
             </a:pPr>
             <a:r>
-              <a:rPr lang="es-CL" sz="3100" b="1"/>
+              <a:rPr lang="es-CL" sz="3100" b="1" dirty="0"/>
               <a:t>Optimización de modelos predictivos mediante detección de </a:t>
             </a:r>
             <a:r>
-              <a:rPr lang="es-CL" sz="3100" b="1" err="1"/>
+              <a:rPr lang="es-CL" sz="3100" b="1" dirty="0" err="1"/>
               <a:t>outliers</a:t>
             </a:r>
             <a:r>
-              <a:rPr lang="es-CL" sz="3100" b="1"/>
+              <a:rPr lang="es-CL" sz="3100" b="1" dirty="0"/>
               <a:t> y </a:t>
             </a:r>
             <a:r>
-              <a:rPr lang="es-CL" sz="3100" b="1" err="1"/>
+              <a:rPr lang="es-CL" sz="3100" b="1" dirty="0" err="1"/>
               <a:t>drift</a:t>
             </a:r>
             <a:br>
-              <a:rPr lang="en-US" sz="3100" b="1">
+              <a:rPr lang="en-US" sz="3100" b="1" dirty="0">
                 <a:ln w="3175" cmpd="sng">
                   <a:noFill/>
                 </a:ln>
               </a:rPr>
             </a:br>
-            <a:endParaRPr lang="es-CL" sz="3100"/>
+            <a:endParaRPr lang="es-CL" sz="3100" dirty="0"/>
           </a:p>
         </p:txBody>
       </p:sp>
